--- a/src/ppt-super/assets/tpl-08-funnel/template.pptx
+++ b/src/ppt-super/assets/tpl-08-funnel/template.pptx
@@ -3136,7 +3136,14 @@
           <a:bodyPr rtlCol="0" anchor="ctr"/>
           <a:lstStyle/>
           <a:p>
-            <a:pPr algn="ctr"/>
+            <a:pPr algn="ctr">
+              <a:spcBef>
+                <a:spcPts val="0"/>
+              </a:spcBef>
+              <a:spcAft>
+                <a:spcPts val="0"/>
+              </a:spcAft>
+            </a:pPr>
           </a:p>
         </p:txBody>
       </p:sp>
@@ -3166,14 +3173,21 @@
               <a:lnSpc>
                 <a:spcPct val="112000"/>
               </a:lnSpc>
+              <a:spcBef>
+                <a:spcPts val="0"/>
+              </a:spcBef>
+              <a:spcAft>
+                <a:spcPts val="0"/>
+              </a:spcAft>
             </a:pPr>
             <a:r>
-              <a:rPr sz="1400" b="1" i="0">
+              <a:rPr sz="1400" b="1" i="0" lang="zh-CN" altLang="zh-CN">
                 <a:solidFill>
                   <a:srgbClr val="FFFFFF"/>
                 </a:solidFill>
                 <a:latin typeface="Microsoft YaHei"/>
                 <a:ea typeface="Microsoft YaHei"/>
+                <a:cs typeface="Microsoft YaHei"/>
               </a:rPr>
               <a:t>智能运维</a:t>
             </a:r>
@@ -3206,14 +3220,21 @@
               <a:lnSpc>
                 <a:spcPct val="112000"/>
               </a:lnSpc>
+              <a:spcBef>
+                <a:spcPts val="0"/>
+              </a:spcBef>
+              <a:spcAft>
+                <a:spcPts val="0"/>
+              </a:spcAft>
             </a:pPr>
             <a:r>
-              <a:rPr sz="2200" b="1" i="0">
+              <a:rPr sz="2200" b="1" i="0" lang="zh-CN" altLang="zh-CN">
                 <a:solidFill>
                   <a:srgbClr val="B90A0A"/>
                 </a:solidFill>
                 <a:latin typeface="Microsoft YaHei"/>
                 <a:ea typeface="Microsoft YaHei"/>
+                <a:cs typeface="Microsoft YaHei"/>
               </a:rPr>
               <a:t>AI 告警三层收敛: 120 万原始告警压缩至 35 张根因工单, MTTR -88%</a:t>
             </a:r>
@@ -3298,7 +3319,14 @@
           <a:bodyPr rtlCol="0" anchor="ctr"/>
           <a:lstStyle/>
           <a:p>
-            <a:pPr algn="ctr"/>
+            <a:pPr algn="ctr">
+              <a:spcBef>
+                <a:spcPts val="0"/>
+              </a:spcBef>
+              <a:spcAft>
+                <a:spcPts val="0"/>
+              </a:spcAft>
+            </a:pPr>
           </a:p>
         </p:txBody>
       </p:sp>
@@ -3342,7 +3370,14 @@
           <a:bodyPr rtlCol="0" anchor="ctr"/>
           <a:lstStyle/>
           <a:p>
-            <a:pPr algn="ctr"/>
+            <a:pPr algn="ctr">
+              <a:spcBef>
+                <a:spcPts val="0"/>
+              </a:spcBef>
+              <a:spcAft>
+                <a:spcPts val="0"/>
+              </a:spcAft>
+            </a:pPr>
           </a:p>
         </p:txBody>
       </p:sp>
@@ -3372,14 +3407,21 @@
               <a:lnSpc>
                 <a:spcPct val="112000"/>
               </a:lnSpc>
+              <a:spcBef>
+                <a:spcPts val="0"/>
+              </a:spcBef>
+              <a:spcAft>
+                <a:spcPts val="0"/>
+              </a:spcAft>
             </a:pPr>
             <a:r>
-              <a:rPr sz="1500" b="1" i="0">
+              <a:rPr sz="1500" b="1" i="0" lang="zh-CN" altLang="zh-CN">
                 <a:solidFill>
                   <a:srgbClr val="262626"/>
                 </a:solidFill>
                 <a:latin typeface="Microsoft YaHei"/>
                 <a:ea typeface="Microsoft YaHei"/>
+                <a:cs typeface="Microsoft YaHei"/>
               </a:rPr>
               <a:t>收敛规模</a:t>
             </a:r>
@@ -3426,7 +3468,14 @@
           <a:bodyPr rtlCol="0" anchor="ctr"/>
           <a:lstStyle/>
           <a:p>
-            <a:pPr algn="ctr"/>
+            <a:pPr algn="ctr">
+              <a:spcBef>
+                <a:spcPts val="0"/>
+              </a:spcBef>
+              <a:spcAft>
+                <a:spcPts val="0"/>
+              </a:spcAft>
+            </a:pPr>
           </a:p>
         </p:txBody>
       </p:sp>
@@ -3470,7 +3519,14 @@
           <a:bodyPr rtlCol="0" anchor="ctr"/>
           <a:lstStyle/>
           <a:p>
-            <a:pPr algn="ctr"/>
+            <a:pPr algn="ctr">
+              <a:spcBef>
+                <a:spcPts val="0"/>
+              </a:spcBef>
+              <a:spcAft>
+                <a:spcPts val="0"/>
+              </a:spcAft>
+            </a:pPr>
           </a:p>
         </p:txBody>
       </p:sp>
@@ -3500,14 +3556,21 @@
               <a:lnSpc>
                 <a:spcPct val="112000"/>
               </a:lnSpc>
+              <a:spcBef>
+                <a:spcPts val="0"/>
+              </a:spcBef>
+              <a:spcAft>
+                <a:spcPts val="0"/>
+              </a:spcAft>
             </a:pPr>
             <a:r>
-              <a:rPr sz="1500" b="1" i="0">
+              <a:rPr sz="1500" b="1" i="0" lang="zh-CN" altLang="zh-CN">
                 <a:solidFill>
                   <a:srgbClr val="262626"/>
                 </a:solidFill>
                 <a:latin typeface="Microsoft YaHei"/>
                 <a:ea typeface="Microsoft YaHei"/>
+                <a:cs typeface="Microsoft YaHei"/>
               </a:rPr>
               <a:t>分层机制解析</a:t>
             </a:r>
@@ -3540,14 +3603,21 @@
               <a:lnSpc>
                 <a:spcPct val="112000"/>
               </a:lnSpc>
+              <a:spcBef>
+                <a:spcPts val="0"/>
+              </a:spcBef>
+              <a:spcAft>
+                <a:spcPts val="0"/>
+              </a:spcAft>
             </a:pPr>
             <a:r>
-              <a:rPr sz="1050" b="0" i="0">
+              <a:rPr sz="1050" b="0" i="0" lang="zh-CN" altLang="zh-CN">
                 <a:solidFill>
                   <a:srgbClr val="595959"/>
                 </a:solidFill>
                 <a:latin typeface="Microsoft YaHei"/>
                 <a:ea typeface="Microsoft YaHei"/>
+                <a:cs typeface="Microsoft YaHei"/>
               </a:rPr>
               <a:t>三层漏斗 · 逐层强收窄 90% → 55% → 22%</a:t>
             </a:r>
@@ -3596,7 +3666,14 @@
           <a:bodyPr rtlCol="0" anchor="ctr"/>
           <a:lstStyle/>
           <a:p>
-            <a:pPr algn="ctr"/>
+            <a:pPr algn="ctr">
+              <a:spcBef>
+                <a:spcPts val="0"/>
+              </a:spcBef>
+              <a:spcAft>
+                <a:spcPts val="0"/>
+              </a:spcAft>
+            </a:pPr>
           </a:p>
         </p:txBody>
       </p:sp>
@@ -3642,7 +3719,14 @@
           <a:bodyPr rtlCol="0" anchor="ctr"/>
           <a:lstStyle/>
           <a:p>
-            <a:pPr algn="ctr"/>
+            <a:pPr algn="ctr">
+              <a:spcBef>
+                <a:spcPts val="0"/>
+              </a:spcBef>
+              <a:spcAft>
+                <a:spcPts val="0"/>
+              </a:spcAft>
+            </a:pPr>
           </a:p>
         </p:txBody>
       </p:sp>
@@ -3688,7 +3772,14 @@
           <a:bodyPr rtlCol="0" anchor="ctr"/>
           <a:lstStyle/>
           <a:p>
-            <a:pPr algn="ctr"/>
+            <a:pPr algn="ctr">
+              <a:spcBef>
+                <a:spcPts val="0"/>
+              </a:spcBef>
+              <a:spcAft>
+                <a:spcPts val="0"/>
+              </a:spcAft>
+            </a:pPr>
           </a:p>
         </p:txBody>
       </p:sp>
@@ -3732,7 +3823,14 @@
           <a:bodyPr rtlCol="0" anchor="ctr"/>
           <a:lstStyle/>
           <a:p>
-            <a:pPr algn="ctr"/>
+            <a:pPr algn="ctr">
+              <a:spcBef>
+                <a:spcPts val="0"/>
+              </a:spcBef>
+              <a:spcAft>
+                <a:spcPts val="0"/>
+              </a:spcAft>
+            </a:pPr>
           </a:p>
         </p:txBody>
       </p:sp>
@@ -3762,14 +3860,21 @@
               <a:lnSpc>
                 <a:spcPct val="112000"/>
               </a:lnSpc>
+              <a:spcBef>
+                <a:spcPts val="0"/>
+              </a:spcBef>
+              <a:spcAft>
+                <a:spcPts val="0"/>
+              </a:spcAft>
             </a:pPr>
             <a:r>
-              <a:rPr sz="1700" b="1" i="0">
+              <a:rPr sz="1700" b="1" i="0" lang="zh-CN" altLang="zh-CN">
                 <a:solidFill>
                   <a:srgbClr val="2E75B6"/>
                 </a:solidFill>
                 <a:latin typeface="Microsoft YaHei"/>
                 <a:ea typeface="Microsoft YaHei"/>
+                <a:cs typeface="Microsoft YaHei"/>
               </a:rPr>
               <a:t>1</a:t>
             </a:r>
@@ -3818,7 +3923,14 @@
           <a:bodyPr rtlCol="0" anchor="ctr"/>
           <a:lstStyle/>
           <a:p>
-            <a:pPr algn="ctr"/>
+            <a:pPr algn="ctr">
+              <a:spcBef>
+                <a:spcPts val="0"/>
+              </a:spcBef>
+              <a:spcAft>
+                <a:spcPts val="0"/>
+              </a:spcAft>
+            </a:pPr>
           </a:p>
         </p:txBody>
       </p:sp>
@@ -3864,7 +3976,14 @@
           <a:bodyPr rtlCol="0" anchor="ctr"/>
           <a:lstStyle/>
           <a:p>
-            <a:pPr algn="ctr"/>
+            <a:pPr algn="ctr">
+              <a:spcBef>
+                <a:spcPts val="0"/>
+              </a:spcBef>
+              <a:spcAft>
+                <a:spcPts val="0"/>
+              </a:spcAft>
+            </a:pPr>
           </a:p>
         </p:txBody>
       </p:sp>
@@ -3910,7 +4029,14 @@
           <a:bodyPr rtlCol="0" anchor="ctr"/>
           <a:lstStyle/>
           <a:p>
-            <a:pPr algn="ctr"/>
+            <a:pPr algn="ctr">
+              <a:spcBef>
+                <a:spcPts val="0"/>
+              </a:spcBef>
+              <a:spcAft>
+                <a:spcPts val="0"/>
+              </a:spcAft>
+            </a:pPr>
           </a:p>
         </p:txBody>
       </p:sp>
@@ -3954,7 +4080,14 @@
           <a:bodyPr rtlCol="0" anchor="ctr"/>
           <a:lstStyle/>
           <a:p>
-            <a:pPr algn="ctr"/>
+            <a:pPr algn="ctr">
+              <a:spcBef>
+                <a:spcPts val="0"/>
+              </a:spcBef>
+              <a:spcAft>
+                <a:spcPts val="0"/>
+              </a:spcAft>
+            </a:pPr>
           </a:p>
         </p:txBody>
       </p:sp>
@@ -3984,14 +4117,21 @@
               <a:lnSpc>
                 <a:spcPct val="112000"/>
               </a:lnSpc>
+              <a:spcBef>
+                <a:spcPts val="0"/>
+              </a:spcBef>
+              <a:spcAft>
+                <a:spcPts val="0"/>
+              </a:spcAft>
             </a:pPr>
             <a:r>
-              <a:rPr sz="1700" b="1" i="0">
+              <a:rPr sz="1700" b="1" i="0" lang="zh-CN" altLang="zh-CN">
                 <a:solidFill>
                   <a:srgbClr val="2E75B6"/>
                 </a:solidFill>
                 <a:latin typeface="Microsoft YaHei"/>
                 <a:ea typeface="Microsoft YaHei"/>
+                <a:cs typeface="Microsoft YaHei"/>
               </a:rPr>
               <a:t>2</a:t>
             </a:r>
@@ -4038,7 +4178,14 @@
           <a:bodyPr rtlCol="0" anchor="ctr"/>
           <a:lstStyle/>
           <a:p>
-            <a:pPr algn="ctr"/>
+            <a:pPr algn="ctr">
+              <a:spcBef>
+                <a:spcPts val="0"/>
+              </a:spcBef>
+              <a:spcAft>
+                <a:spcPts val="0"/>
+              </a:spcAft>
+            </a:pPr>
           </a:p>
         </p:txBody>
       </p:sp>
@@ -4082,7 +4229,14 @@
           <a:bodyPr rtlCol="0" anchor="ctr"/>
           <a:lstStyle/>
           <a:p>
-            <a:pPr algn="ctr"/>
+            <a:pPr algn="ctr">
+              <a:spcBef>
+                <a:spcPts val="0"/>
+              </a:spcBef>
+              <a:spcAft>
+                <a:spcPts val="0"/>
+              </a:spcAft>
+            </a:pPr>
           </a:p>
         </p:txBody>
       </p:sp>
@@ -4126,7 +4280,14 @@
           <a:bodyPr rtlCol="0" anchor="ctr"/>
           <a:lstStyle/>
           <a:p>
-            <a:pPr algn="ctr"/>
+            <a:pPr algn="ctr">
+              <a:spcBef>
+                <a:spcPts val="0"/>
+              </a:spcBef>
+              <a:spcAft>
+                <a:spcPts val="0"/>
+              </a:spcAft>
+            </a:pPr>
           </a:p>
         </p:txBody>
       </p:sp>
@@ -4278,7 +4439,14 @@
           <a:bodyPr rtlCol="0" anchor="ctr"/>
           <a:lstStyle/>
           <a:p>
-            <a:pPr algn="ctr"/>
+            <a:pPr algn="ctr">
+              <a:spcBef>
+                <a:spcPts val="0"/>
+              </a:spcBef>
+              <a:spcAft>
+                <a:spcPts val="0"/>
+              </a:spcAft>
+            </a:pPr>
           </a:p>
         </p:txBody>
       </p:sp>
@@ -4308,14 +4476,21 @@
               <a:lnSpc>
                 <a:spcPct val="112000"/>
               </a:lnSpc>
+              <a:spcBef>
+                <a:spcPts val="0"/>
+              </a:spcBef>
+              <a:spcAft>
+                <a:spcPts val="0"/>
+              </a:spcAft>
             </a:pPr>
             <a:r>
-              <a:rPr sz="1700" b="1" i="0">
+              <a:rPr sz="1700" b="1" i="0" lang="zh-CN" altLang="zh-CN">
                 <a:solidFill>
                   <a:srgbClr val="1F4E79"/>
                 </a:solidFill>
                 <a:latin typeface="Microsoft YaHei"/>
                 <a:ea typeface="Microsoft YaHei"/>
+                <a:cs typeface="Microsoft YaHei"/>
               </a:rPr>
               <a:t>3</a:t>
             </a:r>
@@ -4364,7 +4539,14 @@
           <a:bodyPr rtlCol="0" anchor="ctr"/>
           <a:lstStyle/>
           <a:p>
-            <a:pPr algn="ctr"/>
+            <a:pPr algn="ctr">
+              <a:spcBef>
+                <a:spcPts val="0"/>
+              </a:spcBef>
+              <a:spcAft>
+                <a:spcPts val="0"/>
+              </a:spcAft>
+            </a:pPr>
           </a:p>
         </p:txBody>
       </p:sp>
@@ -4394,14 +4576,21 @@
               <a:lnSpc>
                 <a:spcPct val="112000"/>
               </a:lnSpc>
+              <a:spcBef>
+                <a:spcPts val="0"/>
+              </a:spcBef>
+              <a:spcAft>
+                <a:spcPts val="0"/>
+              </a:spcAft>
             </a:pPr>
             <a:r>
-              <a:rPr sz="1050" b="1" i="0">
+              <a:rPr sz="1050" b="1" i="0" lang="zh-CN" altLang="zh-CN">
                 <a:solidFill>
                   <a:srgbClr val="1F4E79"/>
                 </a:solidFill>
                 <a:latin typeface="Microsoft YaHei"/>
                 <a:ea typeface="Microsoft YaHei"/>
+                <a:cs typeface="Microsoft YaHei"/>
               </a:rPr>
               <a:t>NE 告警</a:t>
             </a:r>
@@ -4450,7 +4639,14 @@
           <a:bodyPr rtlCol="0" anchor="ctr"/>
           <a:lstStyle/>
           <a:p>
-            <a:pPr algn="ctr"/>
+            <a:pPr algn="ctr">
+              <a:spcBef>
+                <a:spcPts val="0"/>
+              </a:spcBef>
+              <a:spcAft>
+                <a:spcPts val="0"/>
+              </a:spcAft>
+            </a:pPr>
           </a:p>
         </p:txBody>
       </p:sp>
@@ -4480,14 +4676,21 @@
               <a:lnSpc>
                 <a:spcPct val="112000"/>
               </a:lnSpc>
+              <a:spcBef>
+                <a:spcPts val="0"/>
+              </a:spcBef>
+              <a:spcAft>
+                <a:spcPts val="0"/>
+              </a:spcAft>
             </a:pPr>
             <a:r>
-              <a:rPr sz="1050" b="1" i="0">
+              <a:rPr sz="1050" b="1" i="0" lang="zh-CN" altLang="zh-CN">
                 <a:solidFill>
                   <a:srgbClr val="1F4E79"/>
                 </a:solidFill>
                 <a:latin typeface="Microsoft YaHei"/>
                 <a:ea typeface="Microsoft YaHei"/>
+                <a:cs typeface="Microsoft YaHei"/>
               </a:rPr>
               <a:t>性能事件</a:t>
             </a:r>
@@ -4536,7 +4739,14 @@
           <a:bodyPr rtlCol="0" anchor="ctr"/>
           <a:lstStyle/>
           <a:p>
-            <a:pPr algn="ctr"/>
+            <a:pPr algn="ctr">
+              <a:spcBef>
+                <a:spcPts val="0"/>
+              </a:spcBef>
+              <a:spcAft>
+                <a:spcPts val="0"/>
+              </a:spcAft>
+            </a:pPr>
           </a:p>
         </p:txBody>
       </p:sp>
@@ -4566,14 +4776,21 @@
               <a:lnSpc>
                 <a:spcPct val="112000"/>
               </a:lnSpc>
+              <a:spcBef>
+                <a:spcPts val="0"/>
+              </a:spcBef>
+              <a:spcAft>
+                <a:spcPts val="0"/>
+              </a:spcAft>
             </a:pPr>
             <a:r>
-              <a:rPr sz="1050" b="1" i="0">
+              <a:rPr sz="1050" b="1" i="0" lang="zh-CN" altLang="zh-CN">
                 <a:solidFill>
                   <a:srgbClr val="1F4E79"/>
                 </a:solidFill>
                 <a:latin typeface="Microsoft YaHei"/>
                 <a:ea typeface="Microsoft YaHei"/>
+                <a:cs typeface="Microsoft YaHei"/>
               </a:rPr>
               <a:t>运行日志</a:t>
             </a:r>
@@ -4620,7 +4837,14 @@
           <a:bodyPr rtlCol="0" anchor="ctr"/>
           <a:lstStyle/>
           <a:p>
-            <a:pPr algn="ctr"/>
+            <a:pPr algn="ctr">
+              <a:spcBef>
+                <a:spcPts val="0"/>
+              </a:spcBef>
+              <a:spcAft>
+                <a:spcPts val="0"/>
+              </a:spcAft>
+            </a:pPr>
           </a:p>
         </p:txBody>
       </p:sp>
@@ -4650,14 +4874,21 @@
               <a:lnSpc>
                 <a:spcPct val="112000"/>
               </a:lnSpc>
+              <a:spcBef>
+                <a:spcPts val="0"/>
+              </a:spcBef>
+              <a:spcAft>
+                <a:spcPts val="0"/>
+              </a:spcAft>
             </a:pPr>
             <a:r>
-              <a:rPr sz="1150" b="1" i="0">
+              <a:rPr sz="1150" b="1" i="0" lang="zh-CN" altLang="zh-CN">
                 <a:solidFill>
                   <a:srgbClr val="262626"/>
                 </a:solidFill>
                 <a:latin typeface="Microsoft YaHei"/>
                 <a:ea typeface="Microsoft YaHei"/>
+                <a:cs typeface="Microsoft YaHei"/>
               </a:rPr>
               <a:t>压缩 99.6%</a:t>
             </a:r>
@@ -4704,7 +4935,14 @@
           <a:bodyPr rtlCol="0" anchor="ctr"/>
           <a:lstStyle/>
           <a:p>
-            <a:pPr algn="ctr"/>
+            <a:pPr algn="ctr">
+              <a:spcBef>
+                <a:spcPts val="0"/>
+              </a:spcBef>
+              <a:spcAft>
+                <a:spcPts val="0"/>
+              </a:spcAft>
+            </a:pPr>
           </a:p>
         </p:txBody>
       </p:sp>
@@ -4734,14 +4972,21 @@
               <a:lnSpc>
                 <a:spcPct val="112000"/>
               </a:lnSpc>
+              <a:spcBef>
+                <a:spcPts val="0"/>
+              </a:spcBef>
+              <a:spcAft>
+                <a:spcPts val="0"/>
+              </a:spcAft>
             </a:pPr>
             <a:r>
-              <a:rPr sz="1150" b="1" i="0">
+              <a:rPr sz="1150" b="1" i="0" lang="zh-CN" altLang="zh-CN">
                 <a:solidFill>
                   <a:srgbClr val="262626"/>
                 </a:solidFill>
                 <a:latin typeface="Microsoft YaHei"/>
                 <a:ea typeface="Microsoft YaHei"/>
+                <a:cs typeface="Microsoft YaHei"/>
               </a:rPr>
               <a:t>收敛 137:1</a:t>
             </a:r>
@@ -4791,7 +5036,14 @@
           <a:bodyPr rtlCol="0" anchor="ctr"/>
           <a:lstStyle/>
           <a:p>
-            <a:pPr algn="ctr"/>
+            <a:pPr algn="ctr">
+              <a:spcBef>
+                <a:spcPts val="0"/>
+              </a:spcBef>
+              <a:spcAft>
+                <a:spcPts val="0"/>
+              </a:spcAft>
+            </a:pPr>
           </a:p>
         </p:txBody>
       </p:sp>
@@ -4821,14 +5073,21 @@
               <a:lnSpc>
                 <a:spcPct val="112000"/>
               </a:lnSpc>
+              <a:spcBef>
+                <a:spcPts val="0"/>
+              </a:spcBef>
+              <a:spcAft>
+                <a:spcPts val="0"/>
+              </a:spcAft>
             </a:pPr>
             <a:r>
-              <a:rPr sz="1200" b="1" i="0">
+              <a:rPr sz="1200" b="1" i="0" lang="zh-CN" altLang="zh-CN">
                 <a:solidFill>
                   <a:srgbClr val="B90A0A"/>
                 </a:solidFill>
                 <a:latin typeface="Microsoft YaHei"/>
                 <a:ea typeface="Microsoft YaHei"/>
+                <a:cs typeface="Microsoft YaHei"/>
               </a:rPr>
               <a:t>端到端压缩 34000:1</a:t>
             </a:r>
@@ -4861,14 +5120,21 @@
               <a:lnSpc>
                 <a:spcPct val="112000"/>
               </a:lnSpc>
+              <a:spcBef>
+                <a:spcPts val="0"/>
+              </a:spcBef>
+              <a:spcAft>
+                <a:spcPts val="0"/>
+              </a:spcAft>
             </a:pPr>
             <a:r>
-              <a:rPr sz="1500" b="1" i="0">
+              <a:rPr sz="1500" b="1" i="0" lang="zh-CN" altLang="zh-CN">
                 <a:solidFill>
                   <a:srgbClr val="1F4E79"/>
                 </a:solidFill>
                 <a:latin typeface="Microsoft YaHei"/>
                 <a:ea typeface="Microsoft YaHei"/>
+                <a:cs typeface="Microsoft YaHei"/>
               </a:rPr>
               <a:t>全量采集层</a:t>
             </a:r>
@@ -4883,8 +5149,8 @@
         </p:nvSpPr>
         <p:spPr>
           <a:xfrm>
-            <a:off x="381000" y="1562100"/>
-            <a:ext cx="1968500" cy="393700"/>
+            <a:off x="381000" y="1510474"/>
+            <a:ext cx="1968500" cy="496951"/>
           </a:xfrm>
           <a:prstGeom prst="rect">
             <a:avLst/>
@@ -4901,14 +5167,21 @@
               <a:lnSpc>
                 <a:spcPct val="112000"/>
               </a:lnSpc>
+              <a:spcBef>
+                <a:spcPts val="0"/>
+              </a:spcBef>
+              <a:spcAft>
+                <a:spcPts val="0"/>
+              </a:spcAft>
             </a:pPr>
             <a:r>
-              <a:rPr sz="3000" b="1" i="0">
+              <a:rPr sz="3000" b="1" i="0" lang="zh-CN" altLang="zh-CN">
                 <a:solidFill>
                   <a:srgbClr val="B90A0A"/>
                 </a:solidFill>
                 <a:latin typeface="Microsoft YaHei"/>
                 <a:ea typeface="Microsoft YaHei"/>
+                <a:cs typeface="Microsoft YaHei"/>
               </a:rPr>
               <a:t>1.2M 条/日</a:t>
             </a:r>
@@ -4941,14 +5214,21 @@
               <a:lnSpc>
                 <a:spcPct val="112000"/>
               </a:lnSpc>
+              <a:spcBef>
+                <a:spcPts val="0"/>
+              </a:spcBef>
+              <a:spcAft>
+                <a:spcPts val="0"/>
+              </a:spcAft>
             </a:pPr>
             <a:r>
-              <a:rPr sz="950" b="0" i="0">
+              <a:rPr sz="950" b="0" i="0" lang="zh-CN" altLang="zh-CN">
                 <a:solidFill>
                   <a:srgbClr val="595959"/>
                 </a:solidFill>
                 <a:latin typeface="Microsoft YaHei"/>
                 <a:ea typeface="Microsoft YaHei"/>
+                <a:cs typeface="Microsoft YaHei"/>
               </a:rPr>
               <a:t>Layer 1 · Input</a:t>
             </a:r>
@@ -5018,14 +5298,21 @@
               <a:lnSpc>
                 <a:spcPct val="112000"/>
               </a:lnSpc>
+              <a:spcBef>
+                <a:spcPts val="0"/>
+              </a:spcBef>
+              <a:spcAft>
+                <a:spcPts val="0"/>
+              </a:spcAft>
             </a:pPr>
             <a:r>
-              <a:rPr sz="1500" b="1" i="0">
+              <a:rPr sz="1500" b="1" i="0" lang="zh-CN" altLang="zh-CN">
                 <a:solidFill>
                   <a:srgbClr val="1F4E79"/>
                 </a:solidFill>
                 <a:latin typeface="Microsoft YaHei"/>
                 <a:ea typeface="Microsoft YaHei"/>
+                <a:cs typeface="Microsoft YaHei"/>
               </a:rPr>
               <a:t>关联聚类层</a:t>
             </a:r>
@@ -5040,8 +5327,8 @@
         </p:nvSpPr>
         <p:spPr>
           <a:xfrm>
-            <a:off x="381000" y="3022600"/>
-            <a:ext cx="1968500" cy="393700"/>
+            <a:off x="381000" y="2970974"/>
+            <a:ext cx="1968500" cy="496951"/>
           </a:xfrm>
           <a:prstGeom prst="rect">
             <a:avLst/>
@@ -5058,14 +5345,21 @@
               <a:lnSpc>
                 <a:spcPct val="112000"/>
               </a:lnSpc>
+              <a:spcBef>
+                <a:spcPts val="0"/>
+              </a:spcBef>
+              <a:spcAft>
+                <a:spcPts val="0"/>
+              </a:spcAft>
             </a:pPr>
             <a:r>
-              <a:rPr sz="3000" b="1" i="0">
+              <a:rPr sz="3000" b="1" i="0" lang="zh-CN" altLang="zh-CN">
                 <a:solidFill>
                   <a:srgbClr val="B90A0A"/>
                 </a:solidFill>
                 <a:latin typeface="Microsoft YaHei"/>
                 <a:ea typeface="Microsoft YaHei"/>
+                <a:cs typeface="Microsoft YaHei"/>
               </a:rPr>
               <a:t>4.8K 簇</a:t>
             </a:r>
@@ -5098,14 +5392,21 @@
               <a:lnSpc>
                 <a:spcPct val="112000"/>
               </a:lnSpc>
+              <a:spcBef>
+                <a:spcPts val="0"/>
+              </a:spcBef>
+              <a:spcAft>
+                <a:spcPts val="0"/>
+              </a:spcAft>
             </a:pPr>
             <a:r>
-              <a:rPr sz="950" b="0" i="0">
+              <a:rPr sz="950" b="0" i="0" lang="zh-CN" altLang="zh-CN">
                 <a:solidFill>
                   <a:srgbClr val="595959"/>
                 </a:solidFill>
                 <a:latin typeface="Microsoft YaHei"/>
                 <a:ea typeface="Microsoft YaHei"/>
+                <a:cs typeface="Microsoft YaHei"/>
               </a:rPr>
               <a:t>Layer 2 · Refine</a:t>
             </a:r>
@@ -5175,14 +5476,21 @@
               <a:lnSpc>
                 <a:spcPct val="112000"/>
               </a:lnSpc>
+              <a:spcBef>
+                <a:spcPts val="0"/>
+              </a:spcBef>
+              <a:spcAft>
+                <a:spcPts val="0"/>
+              </a:spcAft>
             </a:pPr>
             <a:r>
-              <a:rPr sz="1500" b="1" i="0">
+              <a:rPr sz="1500" b="1" i="0" lang="zh-CN" altLang="zh-CN">
                 <a:solidFill>
                   <a:srgbClr val="1F4E79"/>
                 </a:solidFill>
                 <a:latin typeface="Microsoft YaHei"/>
                 <a:ea typeface="Microsoft YaHei"/>
+                <a:cs typeface="Microsoft YaHei"/>
               </a:rPr>
               <a:t>根因定位层</a:t>
             </a:r>
@@ -5197,8 +5505,8 @@
         </p:nvSpPr>
         <p:spPr>
           <a:xfrm>
-            <a:off x="381000" y="4483100"/>
-            <a:ext cx="1968500" cy="393700"/>
+            <a:off x="381000" y="4431474"/>
+            <a:ext cx="1968500" cy="496951"/>
           </a:xfrm>
           <a:prstGeom prst="rect">
             <a:avLst/>
@@ -5215,14 +5523,21 @@
               <a:lnSpc>
                 <a:spcPct val="112000"/>
               </a:lnSpc>
+              <a:spcBef>
+                <a:spcPts val="0"/>
+              </a:spcBef>
+              <a:spcAft>
+                <a:spcPts val="0"/>
+              </a:spcAft>
             </a:pPr>
             <a:r>
-              <a:rPr sz="3000" b="1" i="0">
+              <a:rPr sz="3000" b="1" i="0" lang="zh-CN" altLang="zh-CN">
                 <a:solidFill>
                   <a:srgbClr val="B90A0A"/>
                 </a:solidFill>
                 <a:latin typeface="Microsoft YaHei"/>
                 <a:ea typeface="Microsoft YaHei"/>
+                <a:cs typeface="Microsoft YaHei"/>
               </a:rPr>
               <a:t>35 单</a:t>
             </a:r>
@@ -5255,14 +5570,21 @@
               <a:lnSpc>
                 <a:spcPct val="112000"/>
               </a:lnSpc>
+              <a:spcBef>
+                <a:spcPts val="0"/>
+              </a:spcBef>
+              <a:spcAft>
+                <a:spcPts val="0"/>
+              </a:spcAft>
             </a:pPr>
             <a:r>
-              <a:rPr sz="950" b="0" i="0">
+              <a:rPr sz="950" b="0" i="0" lang="zh-CN" altLang="zh-CN">
                 <a:solidFill>
                   <a:srgbClr val="595959"/>
                 </a:solidFill>
                 <a:latin typeface="Microsoft YaHei"/>
                 <a:ea typeface="Microsoft YaHei"/>
+                <a:cs typeface="Microsoft YaHei"/>
               </a:rPr>
               <a:t>Layer 3 · Output</a:t>
             </a:r>
@@ -5314,8 +5636,8 @@
         </p:nvSpPr>
         <p:spPr>
           <a:xfrm>
-            <a:off x="381000" y="5175250"/>
-            <a:ext cx="2095499" cy="152400"/>
+            <a:off x="381000" y="5157216"/>
+            <a:ext cx="2095499" cy="188468"/>
           </a:xfrm>
           <a:prstGeom prst="rect">
             <a:avLst/>
@@ -5332,14 +5654,21 @@
               <a:lnSpc>
                 <a:spcPct val="112000"/>
               </a:lnSpc>
+              <a:spcBef>
+                <a:spcPts val="0"/>
+              </a:spcBef>
+              <a:spcAft>
+                <a:spcPts val="0"/>
+              </a:spcAft>
             </a:pPr>
             <a:r>
-              <a:rPr sz="1050" b="0" i="0">
+              <a:rPr sz="1050" b="0" i="0" lang="zh-CN" altLang="zh-CN">
                 <a:solidFill>
                   <a:srgbClr val="595959"/>
                 </a:solidFill>
                 <a:latin typeface="Microsoft YaHei"/>
                 <a:ea typeface="Microsoft YaHei"/>
+                <a:cs typeface="Microsoft YaHei"/>
               </a:rPr>
               <a:t>逐层相对量级 (示意)</a:t>
             </a:r>
@@ -5422,7 +5751,14 @@
           <a:bodyPr rtlCol="0" anchor="ctr"/>
           <a:lstStyle/>
           <a:p>
-            <a:pPr algn="ctr"/>
+            <a:pPr algn="ctr">
+              <a:spcBef>
+                <a:spcPts val="0"/>
+              </a:spcBef>
+              <a:spcAft>
+                <a:spcPts val="0"/>
+              </a:spcAft>
+            </a:pPr>
           </a:p>
         </p:txBody>
       </p:sp>
@@ -5434,8 +5770,8 @@
         </p:nvSpPr>
         <p:spPr>
           <a:xfrm>
-            <a:off x="477308" y="5361940"/>
-            <a:ext cx="656166" cy="139700"/>
+            <a:off x="477308" y="5341556"/>
+            <a:ext cx="656166" cy="180467"/>
           </a:xfrm>
           <a:prstGeom prst="rect">
             <a:avLst/>
@@ -5452,14 +5788,21 @@
               <a:lnSpc>
                 <a:spcPct val="112000"/>
               </a:lnSpc>
+              <a:spcBef>
+                <a:spcPts val="0"/>
+              </a:spcBef>
+              <a:spcAft>
+                <a:spcPts val="0"/>
+              </a:spcAft>
             </a:pPr>
             <a:r>
-              <a:rPr sz="1000" b="1" i="0">
+              <a:rPr sz="1000" b="1" i="0" lang="zh-CN" altLang="zh-CN">
                 <a:solidFill>
                   <a:srgbClr val="262626"/>
                 </a:solidFill>
                 <a:latin typeface="Microsoft YaHei"/>
                 <a:ea typeface="Microsoft YaHei"/>
+                <a:cs typeface="Microsoft YaHei"/>
               </a:rPr>
               <a:t>100</a:t>
             </a:r>
@@ -5492,14 +5835,21 @@
               <a:lnSpc>
                 <a:spcPct val="112000"/>
               </a:lnSpc>
+              <a:spcBef>
+                <a:spcPts val="0"/>
+              </a:spcBef>
+              <a:spcAft>
+                <a:spcPts val="0"/>
+              </a:spcAft>
             </a:pPr>
             <a:r>
-              <a:rPr sz="950" b="0" i="0">
+              <a:rPr sz="950" b="0" i="0" lang="zh-CN" altLang="zh-CN">
                 <a:solidFill>
                   <a:srgbClr val="595959"/>
                 </a:solidFill>
                 <a:latin typeface="Microsoft YaHei"/>
                 <a:ea typeface="Microsoft YaHei"/>
+                <a:cs typeface="Microsoft YaHei"/>
               </a:rPr>
               <a:t>L1</a:t>
             </a:r>
@@ -5546,7 +5896,14 @@
           <a:bodyPr rtlCol="0" anchor="ctr"/>
           <a:lstStyle/>
           <a:p>
-            <a:pPr algn="ctr"/>
+            <a:pPr algn="ctr">
+              <a:spcBef>
+                <a:spcPts val="0"/>
+              </a:spcBef>
+              <a:spcAft>
+                <a:spcPts val="0"/>
+              </a:spcAft>
+            </a:pPr>
           </a:p>
         </p:txBody>
       </p:sp>
@@ -5558,8 +5915,8 @@
         </p:nvSpPr>
         <p:spPr>
           <a:xfrm>
-            <a:off x="1133475" y="5735015"/>
-            <a:ext cx="656166" cy="139700"/>
+            <a:off x="1133475" y="5714631"/>
+            <a:ext cx="656166" cy="180467"/>
           </a:xfrm>
           <a:prstGeom prst="rect">
             <a:avLst/>
@@ -5576,14 +5933,21 @@
               <a:lnSpc>
                 <a:spcPct val="112000"/>
               </a:lnSpc>
+              <a:spcBef>
+                <a:spcPts val="0"/>
+              </a:spcBef>
+              <a:spcAft>
+                <a:spcPts val="0"/>
+              </a:spcAft>
             </a:pPr>
             <a:r>
-              <a:rPr sz="1000" b="1" i="0">
+              <a:rPr sz="1000" b="1" i="0" lang="zh-CN" altLang="zh-CN">
                 <a:solidFill>
                   <a:srgbClr val="262626"/>
                 </a:solidFill>
                 <a:latin typeface="Microsoft YaHei"/>
                 <a:ea typeface="Microsoft YaHei"/>
+                <a:cs typeface="Microsoft YaHei"/>
               </a:rPr>
               <a:t>28</a:t>
             </a:r>
@@ -5616,14 +5980,21 @@
               <a:lnSpc>
                 <a:spcPct val="112000"/>
               </a:lnSpc>
+              <a:spcBef>
+                <a:spcPts val="0"/>
+              </a:spcBef>
+              <a:spcAft>
+                <a:spcPts val="0"/>
+              </a:spcAft>
             </a:pPr>
             <a:r>
-              <a:rPr sz="950" b="0" i="0">
+              <a:rPr sz="950" b="0" i="0" lang="zh-CN" altLang="zh-CN">
                 <a:solidFill>
                   <a:srgbClr val="595959"/>
                 </a:solidFill>
                 <a:latin typeface="Microsoft YaHei"/>
                 <a:ea typeface="Microsoft YaHei"/>
+                <a:cs typeface="Microsoft YaHei"/>
               </a:rPr>
               <a:t>L2</a:t>
             </a:r>
@@ -5670,7 +6041,14 @@
           <a:bodyPr rtlCol="0" anchor="ctr"/>
           <a:lstStyle/>
           <a:p>
-            <a:pPr algn="ctr"/>
+            <a:pPr algn="ctr">
+              <a:spcBef>
+                <a:spcPts val="0"/>
+              </a:spcBef>
+              <a:spcAft>
+                <a:spcPts val="0"/>
+              </a:spcAft>
+            </a:pPr>
           </a:p>
         </p:txBody>
       </p:sp>
@@ -5682,8 +6060,8 @@
         </p:nvSpPr>
         <p:spPr>
           <a:xfrm>
-            <a:off x="1789641" y="5849010"/>
-            <a:ext cx="656166" cy="139700"/>
+            <a:off x="1789641" y="5828626"/>
+            <a:ext cx="656166" cy="180467"/>
           </a:xfrm>
           <a:prstGeom prst="rect">
             <a:avLst/>
@@ -5700,14 +6078,21 @@
               <a:lnSpc>
                 <a:spcPct val="112000"/>
               </a:lnSpc>
+              <a:spcBef>
+                <a:spcPts val="0"/>
+              </a:spcBef>
+              <a:spcAft>
+                <a:spcPts val="0"/>
+              </a:spcAft>
             </a:pPr>
             <a:r>
-              <a:rPr sz="1000" b="1" i="0">
+              <a:rPr sz="1000" b="1" i="0" lang="zh-CN" altLang="zh-CN">
                 <a:solidFill>
                   <a:srgbClr val="262626"/>
                 </a:solidFill>
                 <a:latin typeface="Microsoft YaHei"/>
                 <a:ea typeface="Microsoft YaHei"/>
+                <a:cs typeface="Microsoft YaHei"/>
               </a:rPr>
               <a:t>6</a:t>
             </a:r>
@@ -5740,14 +6125,21 @@
               <a:lnSpc>
                 <a:spcPct val="112000"/>
               </a:lnSpc>
+              <a:spcBef>
+                <a:spcPts val="0"/>
+              </a:spcBef>
+              <a:spcAft>
+                <a:spcPts val="0"/>
+              </a:spcAft>
             </a:pPr>
             <a:r>
-              <a:rPr sz="950" b="0" i="0">
+              <a:rPr sz="950" b="0" i="0" lang="zh-CN" altLang="zh-CN">
                 <a:solidFill>
                   <a:srgbClr val="595959"/>
                 </a:solidFill>
                 <a:latin typeface="Microsoft YaHei"/>
                 <a:ea typeface="Microsoft YaHei"/>
+                <a:cs typeface="Microsoft YaHei"/>
               </a:rPr>
               <a:t>L3</a:t>
             </a:r>
@@ -5796,7 +6188,14 @@
           <a:bodyPr rtlCol="0" anchor="ctr"/>
           <a:lstStyle/>
           <a:p>
-            <a:pPr algn="ctr"/>
+            <a:pPr algn="ctr">
+              <a:spcBef>
+                <a:spcPts val="0"/>
+              </a:spcBef>
+              <a:spcAft>
+                <a:spcPts val="0"/>
+              </a:spcAft>
+            </a:pPr>
           </a:p>
         </p:txBody>
       </p:sp>
@@ -5840,7 +6239,14 @@
           <a:bodyPr rtlCol="0" anchor="ctr"/>
           <a:lstStyle/>
           <a:p>
-            <a:pPr algn="ctr"/>
+            <a:pPr algn="ctr">
+              <a:spcBef>
+                <a:spcPts val="0"/>
+              </a:spcBef>
+              <a:spcAft>
+                <a:spcPts val="0"/>
+              </a:spcAft>
+            </a:pPr>
           </a:p>
         </p:txBody>
       </p:sp>
@@ -5870,14 +6276,21 @@
               <a:lnSpc>
                 <a:spcPct val="130000"/>
               </a:lnSpc>
+              <a:spcBef>
+                <a:spcPts val="0"/>
+              </a:spcBef>
+              <a:spcAft>
+                <a:spcPts val="0"/>
+              </a:spcAft>
             </a:pPr>
             <a:r>
-              <a:rPr sz="1150" b="0" i="0">
+              <a:rPr sz="1150" b="0" i="0" lang="zh-CN" altLang="zh-CN">
                 <a:solidFill>
                   <a:srgbClr val="262626"/>
                 </a:solidFill>
                 <a:latin typeface="Microsoft YaHei"/>
                 <a:ea typeface="Microsoft YaHei"/>
+                <a:cs typeface="Microsoft YaHei"/>
               </a:rPr>
               <a:t>全网 NE 告警、性能事件与运行日志三源在本层统一汇聚, 经 Flink 流式接入稳定承载 45K TPS 峰值流量; 5 分钟滑动窗口去重先行压降 38% 冗余, 异常样本秒级旁路缓存, 保证高峰时段不丢数、不阻塞下游关联分析, 为后续逐层收敛提供完整可信的输入。</a:t>
             </a:r>
@@ -5963,7 +6376,14 @@
           <a:bodyPr rtlCol="0" anchor="ctr"/>
           <a:lstStyle/>
           <a:p>
-            <a:pPr algn="ctr"/>
+            <a:pPr algn="ctr">
+              <a:spcBef>
+                <a:spcPts val="0"/>
+              </a:spcBef>
+              <a:spcAft>
+                <a:spcPts val="0"/>
+              </a:spcAft>
+            </a:pPr>
           </a:p>
         </p:txBody>
       </p:sp>
@@ -6007,7 +6427,14 @@
           <a:bodyPr rtlCol="0" anchor="ctr"/>
           <a:lstStyle/>
           <a:p>
-            <a:pPr algn="ctr"/>
+            <a:pPr algn="ctr">
+              <a:spcBef>
+                <a:spcPts val="0"/>
+              </a:spcBef>
+              <a:spcAft>
+                <a:spcPts val="0"/>
+              </a:spcAft>
+            </a:pPr>
           </a:p>
         </p:txBody>
       </p:sp>
@@ -6019,8 +6446,8 @@
         </p:nvSpPr>
         <p:spPr>
           <a:xfrm>
-            <a:off x="8953500" y="2921000"/>
-            <a:ext cx="2730500" cy="1333500"/>
+            <a:off x="8953500" y="2904236"/>
+            <a:ext cx="2730500" cy="1367028"/>
           </a:xfrm>
           <a:prstGeom prst="rect">
             <a:avLst/>
@@ -6037,14 +6464,21 @@
               <a:lnSpc>
                 <a:spcPct val="130000"/>
               </a:lnSpc>
+              <a:spcBef>
+                <a:spcPts val="0"/>
+              </a:spcBef>
+              <a:spcAft>
+                <a:spcPts val="0"/>
+              </a:spcAft>
             </a:pPr>
             <a:r>
-              <a:rPr sz="1150" b="0" i="0">
+              <a:rPr sz="1150" b="0" i="0" lang="zh-CN" altLang="zh-CN">
                 <a:solidFill>
                   <a:srgbClr val="262626"/>
                 </a:solidFill>
                 <a:latin typeface="Microsoft YaHei"/>
                 <a:ea typeface="Microsoft YaHei"/>
+                <a:cs typeface="Microsoft YaHei"/>
               </a:rPr>
               <a:t>本层以拓扑与时序双维关联将跨域告警自动归簇, GNN 传播模型精准识别衍生告警并剥离噪声; 单层压缩比达到 250:1, 归簇准确率 96.5%, 同时在簇内完成根因候选排序并输出置信度, 使海量告警在进入定位层之前已收敛为可解释的少量事件簇。</a:t>
             </a:r>
@@ -6130,7 +6564,14 @@
           <a:bodyPr rtlCol="0" anchor="ctr"/>
           <a:lstStyle/>
           <a:p>
-            <a:pPr algn="ctr"/>
+            <a:pPr algn="ctr">
+              <a:spcBef>
+                <a:spcPts val="0"/>
+              </a:spcBef>
+              <a:spcAft>
+                <a:spcPts val="0"/>
+              </a:spcAft>
+            </a:pPr>
           </a:p>
         </p:txBody>
       </p:sp>
@@ -6174,7 +6615,14 @@
           <a:bodyPr rtlCol="0" anchor="ctr"/>
           <a:lstStyle/>
           <a:p>
-            <a:pPr algn="ctr"/>
+            <a:pPr algn="ctr">
+              <a:spcBef>
+                <a:spcPts val="0"/>
+              </a:spcBef>
+              <a:spcAft>
+                <a:spcPts val="0"/>
+              </a:spcAft>
+            </a:pPr>
           </a:p>
         </p:txBody>
       </p:sp>
@@ -6186,8 +6634,8 @@
         </p:nvSpPr>
         <p:spPr>
           <a:xfrm>
-            <a:off x="8953500" y="4635500"/>
-            <a:ext cx="2730500" cy="1333500"/>
+            <a:off x="8953500" y="4618736"/>
+            <a:ext cx="2730500" cy="1367028"/>
           </a:xfrm>
           <a:prstGeom prst="rect">
             <a:avLst/>
@@ -6204,14 +6652,21 @@
               <a:lnSpc>
                 <a:spcPct val="130000"/>
               </a:lnSpc>
+              <a:spcBef>
+                <a:spcPts val="0"/>
+              </a:spcBef>
+              <a:spcAft>
+                <a:spcPts val="0"/>
+              </a:spcAft>
             </a:pPr>
             <a:r>
-              <a:rPr sz="1150" b="0" i="0">
+              <a:rPr sz="1150" b="0" i="0" lang="zh-CN" altLang="zh-CN">
                 <a:solidFill>
                   <a:srgbClr val="262626"/>
                 </a:solidFill>
                 <a:latin typeface="Microsoft YaHei"/>
                 <a:ea typeface="Microsoft YaHei"/>
+                <a:cs typeface="Microsoft YaHei"/>
               </a:rPr>
               <a:t>末层由大模型完成根因推理, 自动生成工单并派发至责任组, Top1 根因命中率 91%, 平均定位用时 4.2 分钟; 处置建议自动引用知识库 Top3 历史方案, 全程闭环跟踪直至验收归档, 确保每一张根因工单都可执行、可追溯、可度量。</a:t>
             </a:r>
@@ -6332,7 +6787,14 @@
           <a:bodyPr rtlCol="0" anchor="ctr"/>
           <a:lstStyle/>
           <a:p>
-            <a:pPr algn="ctr"/>
+            <a:pPr algn="ctr">
+              <a:spcBef>
+                <a:spcPts val="0"/>
+              </a:spcBef>
+              <a:spcAft>
+                <a:spcPts val="0"/>
+              </a:spcAft>
+            </a:pPr>
           </a:p>
         </p:txBody>
       </p:sp>
@@ -6362,14 +6824,21 @@
               <a:lnSpc>
                 <a:spcPct val="112000"/>
               </a:lnSpc>
+              <a:spcBef>
+                <a:spcPts val="0"/>
+              </a:spcBef>
+              <a:spcAft>
+                <a:spcPts val="0"/>
+              </a:spcAft>
             </a:pPr>
             <a:r>
-              <a:rPr sz="1400" b="1" i="0">
+              <a:rPr sz="1400" b="1" i="0" lang="zh-CN" altLang="zh-CN">
                 <a:solidFill>
                   <a:srgbClr val="262626"/>
                 </a:solidFill>
                 <a:latin typeface="Microsoft YaHei"/>
                 <a:ea typeface="Microsoft YaHei"/>
+                <a:cs typeface="Microsoft YaHei"/>
               </a:rPr>
               <a:t>MTTR 92 分钟 → 11 分钟, 夜间值守人力释放 60%</a:t>
             </a:r>
